--- a/2-seances/S07-la-case-occupee/a-projeter/seance-7-projection.pptx
+++ b/2-seances/S07-la-case-occupee/a-projeter/seance-7-projection.pptx
@@ -1659,7 +1659,7 @@
           <a:p>
             <a:r>
               <a:rPr lang="en-US" dirty="0"/>
-              <a:t>Tenez cette promesse : c'est l'ouverture de la séance 9. Un bug qu'on nomme et qu'on date n'est plus un échec, c'est un programme.</a:t>
+              <a:t>À PROJETER AVANT L'ATELIER DU PROJET : le code n'a pas encore le test de la case libre. Tenez la promesse : c'est l'ouverture de la séance 9. POUR VOUS : une fois le test écrit, le 0 sera refusé avec le message faux « déjà prise ». Le bug sera caché, pas réparé. Si un élève le voit, félicitez-le très fort.</a:t>
             </a:r>
             <a:endParaRPr lang="en-US" dirty="0"/>
           </a:p>
@@ -5123,7 +5123,7 @@
                 <a:ea typeface="Calibri" pitchFamily="34" charset="-122"/>
                 <a:cs typeface="Calibri" pitchFamily="34" charset="-120"/>
               </a:rPr>
-              <a:t>→  Il est DANS le premier : 8 espaces</a:t>
+              <a:t>→  Il est dans le else : 4 espaces</a:t>
             </a:r>
             <a:endParaRPr lang="en-US" sz="1300" dirty="0"/>
           </a:p>
